--- a/docs/brief/chip-that-says-no-brief.pptx
+++ b/docs/brief/chip-that-says-no-brief.pptx
@@ -124,60 +124,60 @@
   <p:extLst>
     <p:ext uri="{521415D9-36F7-43E2-AB2F-B90AF26B5E84}">
       <p14:sectionLst xmlns:p14="http://schemas.microsoft.com/office/powerpoint/2010/main">
-        <p14:section name="Opening" id="{28c84042-9b32-001a-057d-e92262b92a99}">
+        <p14:section name="Opening" id="{7318b034-3fa5-a806-0141-77ecf3e64a25}">
           <p14:sldIdLst>
             <p14:sldId id="256"/>
             <p14:sldId id="257"/>
           </p14:sldIdLst>
         </p14:section>
-        <p14:section name="Thesis" id="{ccb50fdd-306f-c37b-8773-2a3a64098e67}">
+        <p14:section name="Thesis" id="{b5d2f243-4500-fa1d-3e61-2602f958097c}">
           <p14:sldIdLst>
             <p14:sldId id="258"/>
             <p14:sldId id="259"/>
           </p14:sldIdLst>
         </p14:section>
-        <p14:section name="Logic" id="{5e74886f-59d0-5cc8-2270-861adbd84e2f}">
+        <p14:section name="Logic" id="{0301d9bd-3605-f3a1-4073-806f28ea7672}">
           <p14:sldIdLst>
             <p14:sldId id="260"/>
             <p14:sldId id="261"/>
           </p14:sldIdLst>
         </p14:section>
-        <p14:section name="Proposal" id="{21747d6b-33b7-3005-7508-bae3b306730c}">
+        <p14:section name="Proposal" id="{a02a8c10-1db2-f372-a429-0a7869b32210}">
           <p14:sldIdLst>
             <p14:sldId id="262"/>
             <p14:sldId id="263"/>
           </p14:sldIdLst>
         </p14:section>
-        <p14:section name="Layers" id="{7ed40503-aab5-8e8e-a6f2-cad685b88e39}">
+        <p14:section name="Layers" id="{f7a2759b-813b-cef4-f321-b12e0608b2d5}">
           <p14:sldIdLst>
             <p14:sldId id="264"/>
             <p14:sldId id="265"/>
           </p14:sldIdLst>
         </p14:section>
-        <p14:section name="How it meets the model" id="{c1db5bfa-1fc8-719b-f14a-1f98b21e8343}">
+        <p14:section name="How it meets the model" id="{7996bb09-4cc5-77c0-4770-a95d31d53da6}">
           <p14:sldIdLst>
             <p14:sldId id="266"/>
             <p14:sldId id="267"/>
           </p14:sldIdLst>
         </p14:section>
-        <p14:section name="Status" id="{4298726c-f861-c79c-b81a-bb5333b58955}">
+        <p14:section name="Status" id="{ff697b67-bb1e-c805-0c89-f6b035aecbbd}">
           <p14:sldIdLst>
             <p14:sldId id="268"/>
           </p14:sldIdLst>
         </p14:section>
-        <p14:section name="Challenges" id="{42c1667c-d0f4-f3d9-de63-408eee26e139}">
+        <p14:section name="Challenges" id="{08beeb9e-0df2-688e-3fe5-6fcb8a0973f1}">
           <p14:sldIdLst>
             <p14:sldId id="269"/>
             <p14:sldId id="270"/>
           </p14:sldIdLst>
         </p14:section>
-        <p14:section name="What I need" id="{f9b6ca15-1749-8ab4-2a03-1090367cb8c7}">
+        <p14:section name="What I need" id="{8748a8d7-55a1-48c6-7636-e55ad829b297}">
           <p14:sldIdLst>
             <p14:sldId id="271"/>
             <p14:sldId id="272"/>
           </p14:sldIdLst>
         </p14:section>
-        <p14:section name="Close" id="{99abe07a-1256-1f05-f51e-9f7a35ca6d23}">
+        <p14:section name="Close" id="{dc7570d7-6082-ab39-4ada-f064f33fe552}">
           <p14:sldIdLst>
             <p14:sldId id="273"/>
           </p14:sldIdLst>
@@ -1378,7 +1378,7 @@
           <a:p>
             <a:r>
               <a:rPr lang="en-US" dirty="0"/>
-              <a:t>Close on the sentence from docs/17, then questions. The repositories hold the model, the tests, the RTL, the circuit simulation and the audit; the blog series is the plain-English route in.</a:t>
+              <a:t>Close on the plain sentence: what it is, what it does, what it can stop. Then the two lines under it. The repositories hold the model, the tests, the RTL, the circuit simulation and the audit; the blog series is the plain-English route in.</a:t>
             </a:r>
             <a:endParaRPr lang="en-US" dirty="0"/>
           </a:p>
@@ -2563,26 +2563,26 @@
         </p:nvSpPr>
         <p:spPr>
           <a:xfrm>
-            <a:off x="548640" y="3200400"/>
-            <a:ext cx="7315200" cy="1645920"/>
-          </a:xfrm>
-          <a:prstGeom prst="rect">
-            <a:avLst/>
-          </a:prstGeom>
-          <a:noFill/>
-          <a:ln/>
-        </p:spPr>
-        <p:txBody>
-          <a:bodyPr wrap="square" lIns="0" tIns="0" rIns="0" bIns="0" rtlCol="0" anchor="t">
-            <a:normAutofit/>
-          </a:bodyPr>
-          <a:lstStyle/>
-          <a:p>
-            <a:pPr indent="0" marL="0">
-              <a:buNone/>
-            </a:pPr>
-            <a:r>
-              <a:rPr lang="en-US" sz="2000" dirty="0">
+            <a:off x="548640" y="3154680"/>
+            <a:ext cx="7680960" cy="1554480"/>
+          </a:xfrm>
+          <a:prstGeom prst="rect">
+            <a:avLst/>
+          </a:prstGeom>
+          <a:noFill/>
+          <a:ln/>
+        </p:spPr>
+        <p:txBody>
+          <a:bodyPr wrap="square" lIns="0" tIns="0" rIns="0" bIns="0" rtlCol="0" anchor="t">
+            <a:normAutofit/>
+          </a:bodyPr>
+          <a:lstStyle/>
+          <a:p>
+            <a:pPr indent="0" marL="0">
+              <a:buNone/>
+            </a:pPr>
+            <a:r>
+              <a:rPr lang="en-US" sz="1900" dirty="0">
                 <a:solidFill>
                   <a:schemeClr val="accent6"/>
                 </a:solidFill>
@@ -2592,7 +2592,7 @@
               </a:rPr>
               <a:t>A multi-layer hardware approach to AI safety. Each topic in two slides: the plain version with a picture, then the technical one.</a:t>
             </a:r>
-            <a:endParaRPr lang="en-US" sz="2000" dirty="0"/>
+            <a:endParaRPr lang="en-US" sz="1900" dirty="0"/>
           </a:p>
         </p:txBody>
       </p:sp>
@@ -15114,7 +15114,7 @@
                 <a:ea typeface="Georgia" pitchFamily="34" charset="-122"/>
                 <a:cs typeface="Georgia" pitchFamily="34" charset="-120"/>
               </a:rPr>
-              <a:t>The one-sentence version</a:t>
+              <a:t>In one sentence</a:t>
             </a:r>
             <a:endParaRPr lang="en-US" sz="4400" dirty="0"/>
           </a:p>
@@ -15128,26 +15128,26 @@
         </p:nvSpPr>
         <p:spPr>
           <a:xfrm>
-            <a:off x="548640" y="3200400"/>
-            <a:ext cx="7315200" cy="1645920"/>
-          </a:xfrm>
-          <a:prstGeom prst="rect">
-            <a:avLst/>
-          </a:prstGeom>
-          <a:noFill/>
-          <a:ln/>
-        </p:spPr>
-        <p:txBody>
-          <a:bodyPr wrap="square" lIns="0" tIns="0" rIns="0" bIns="0" rtlCol="0" anchor="t">
-            <a:normAutofit/>
-          </a:bodyPr>
-          <a:lstStyle/>
-          <a:p>
-            <a:pPr indent="0" marL="0">
-              <a:buNone/>
-            </a:pPr>
-            <a:r>
-              <a:rPr lang="en-US" sz="2000" dirty="0">
+            <a:off x="548640" y="3154680"/>
+            <a:ext cx="7680960" cy="1554480"/>
+          </a:xfrm>
+          <a:prstGeom prst="rect">
+            <a:avLst/>
+          </a:prstGeom>
+          <a:noFill/>
+          <a:ln/>
+        </p:spPr>
+        <p:txBody>
+          <a:bodyPr wrap="square" lIns="0" tIns="0" rIns="0" bIns="0" rtlCol="0" anchor="t">
+            <a:normAutofit/>
+          </a:bodyPr>
+          <a:lstStyle/>
+          <a:p>
+            <a:pPr indent="0" marL="0">
+              <a:buNone/>
+            </a:pPr>
+            <a:r>
+              <a:rPr lang="en-US" sz="1900" dirty="0">
                 <a:solidFill>
                   <a:schemeClr val="accent6"/>
                 </a:solidFill>
@@ -15155,9 +15155,9 @@
                 <a:ea typeface="Arial" pitchFamily="34" charset="-122"/>
                 <a:cs typeface="Arial" pitchFamily="34" charset="-120"/>
               </a:rPr>
-              <a:t>The governor never knows what the model is thinking and does not need to, because thinking fires nothing. A ticket does, and the model cannot mint one.</a:t>
-            </a:r>
-            <a:endParaRPr lang="en-US" sz="2000" dirty="0"/>
+              <a:t>A separate safety chip beside every AI GPU that checks each action the AI attempts against rules signed by people the AI cannot influence, stamps the allowed ones so the devices that carry them out can verify the stamp themselves, and cuts the power when something is wrong.</a:t>
+            </a:r>
+            <a:endParaRPr lang="en-US" sz="1900" dirty="0"/>
           </a:p>
         </p:txBody>
       </p:sp>
@@ -15210,26 +15210,90 @@
         </p:nvSpPr>
         <p:spPr>
           <a:xfrm>
-            <a:off x="548640" y="5029200"/>
-            <a:ext cx="8229600" cy="914400"/>
-          </a:xfrm>
-          <a:prstGeom prst="rect">
-            <a:avLst/>
-          </a:prstGeom>
-          <a:noFill/>
-          <a:ln/>
-        </p:spPr>
-        <p:txBody>
-          <a:bodyPr wrap="square" lIns="0" tIns="0" rIns="0" bIns="0" rtlCol="0" anchor="t">
-            <a:normAutofit/>
-          </a:bodyPr>
-          <a:lstStyle/>
-          <a:p>
-            <a:pPr indent="0" marL="0">
-              <a:buNone/>
-            </a:pPr>
-            <a:r>
-              <a:rPr lang="en-US" sz="1300" dirty="0">
+            <a:off x="548640" y="4800600"/>
+            <a:ext cx="7680960" cy="822960"/>
+          </a:xfrm>
+          <a:prstGeom prst="rect">
+            <a:avLst/>
+          </a:prstGeom>
+          <a:noFill/>
+          <a:ln/>
+        </p:spPr>
+        <p:txBody>
+          <a:bodyPr wrap="square" lIns="0" tIns="0" rIns="0" bIns="0" rtlCol="0" anchor="t">
+            <a:normAutofit/>
+          </a:bodyPr>
+          <a:lstStyle/>
+          <a:p>
+            <a:pPr indent="0" marL="0">
+              <a:spcAft>
+                <a:spcPts val="400"/>
+              </a:spcAft>
+              <a:buNone/>
+            </a:pPr>
+            <a:r>
+              <a:rPr lang="en-US" sz="1400" i="1" dirty="0">
+                <a:solidFill>
+                  <a:schemeClr val="accent1"/>
+                </a:solidFill>
+                <a:latin typeface="Arial" pitchFamily="34" charset="0"/>
+                <a:ea typeface="Arial" pitchFamily="34" charset="-122"/>
+                <a:cs typeface="Arial" pitchFamily="34" charset="-120"/>
+              </a:rPr>
+              <a:t>The AI can think whatever it likes. It cannot act without the stamp, and it cannot forge one.</a:t>
+            </a:r>
+            <a:endParaRPr lang="en-US" sz="1400" dirty="0"/>
+          </a:p>
+          <a:p>
+            <a:pPr indent="0" marL="0">
+              <a:spcAft>
+                <a:spcPts val="400"/>
+              </a:spcAft>
+              <a:buNone/>
+            </a:pPr>
+            <a:r>
+              <a:rPr lang="en-US" sz="1400" i="1" dirty="0">
+                <a:solidFill>
+                  <a:schemeClr val="accent1"/>
+                </a:solidFill>
+                <a:latin typeface="Arial" pitchFamily="34" charset="0"/>
+                <a:ea typeface="Arial" pitchFamily="34" charset="-122"/>
+                <a:cs typeface="Arial" pitchFamily="34" charset="-120"/>
+              </a:rPr>
+              <a:t>Added to the server's own boards. Nothing changes in the GPU or in CUDA.</a:t>
+            </a:r>
+            <a:endParaRPr lang="en-US" sz="1400" dirty="0"/>
+          </a:p>
+        </p:txBody>
+      </p:sp>
+      <p:sp>
+        <p:nvSpPr>
+          <p:cNvPr id="6" name="Text 4"/>
+          <p:cNvSpPr txBox="1"/>
+          <p:nvPr/>
+        </p:nvSpPr>
+        <p:spPr>
+          <a:xfrm>
+            <a:off x="548640" y="5623560"/>
+            <a:ext cx="8686800" cy="548640"/>
+          </a:xfrm>
+          <a:prstGeom prst="rect">
+            <a:avLst/>
+          </a:prstGeom>
+          <a:noFill/>
+          <a:ln/>
+        </p:spPr>
+        <p:txBody>
+          <a:bodyPr wrap="square" lIns="0" tIns="0" rIns="0" bIns="0" rtlCol="0" anchor="t">
+            <a:normAutofit/>
+          </a:bodyPr>
+          <a:lstStyle/>
+          <a:p>
+            <a:pPr indent="0" marL="0">
+              <a:buNone/>
+            </a:pPr>
+            <a:r>
+              <a:rPr lang="en-US" sz="1100" dirty="0">
                 <a:solidFill>
                   <a:schemeClr val="accent6"/>
                 </a:solidFill>
@@ -15237,33 +15301,16 @@
                 <a:ea typeface="Arial" pitchFamily="34" charset="-122"/>
                 <a:cs typeface="Arial" pitchFamily="34" charset="-120"/>
               </a:rPr>
-              <a:t>github.com/YobieBenjamin/safety-governor</a:t>
-            </a:r>
-            <a:endParaRPr lang="en-US" sz="1300" dirty="0"/>
-          </a:p>
-          <a:p>
-            <a:pPr indent="0" marL="0">
-              <a:buNone/>
-            </a:pPr>
-            <a:r>
-              <a:rPr lang="en-US" sz="1300" dirty="0">
-                <a:solidFill>
-                  <a:schemeClr val="accent6"/>
-                </a:solidFill>
-                <a:latin typeface="Arial" pitchFamily="34" charset="0"/>
-                <a:ea typeface="Arial" pitchFamily="34" charset="-122"/>
-                <a:cs typeface="Arial" pitchFamily="34" charset="-120"/>
-              </a:rPr>
-              <a:t>github.com/YobieBenjamin/hardware-and-silicon</a:t>
-            </a:r>
-            <a:endParaRPr lang="en-US" sz="1300" dirty="0"/>
-          </a:p>
-          <a:p>
-            <a:pPr indent="0" marL="0">
-              <a:buNone/>
-            </a:pPr>
-            <a:r>
-              <a:rPr lang="en-US" sz="1300" dirty="0">
+              <a:t>github.com/YobieBenjamin/safety-governor   ·   github.com/YobieBenjamin/hardware-and-silicon</a:t>
+            </a:r>
+            <a:endParaRPr lang="en-US" sz="1100" dirty="0"/>
+          </a:p>
+          <a:p>
+            <a:pPr indent="0" marL="0">
+              <a:buNone/>
+            </a:pPr>
+            <a:r>
+              <a:rPr lang="en-US" sz="1100" dirty="0">
                 <a:solidFill>
                   <a:schemeClr val="accent3"/>
                 </a:solidFill>
@@ -15273,7 +15320,7 @@
               </a:rPr>
               <a:t>The Chip That Says No, parts 1 to 4, and design documents 00 to 18</a:t>
             </a:r>
-            <a:endParaRPr lang="en-US" sz="1300" dirty="0"/>
+            <a:endParaRPr lang="en-US" sz="1100" dirty="0"/>
           </a:p>
         </p:txBody>
       </p:sp>

--- a/docs/brief/chip-that-says-no-brief.pptx
+++ b/docs/brief/chip-that-says-no-brief.pptx
@@ -124,60 +124,60 @@
   <p:extLst>
     <p:ext uri="{521415D9-36F7-43E2-AB2F-B90AF26B5E84}">
       <p14:sectionLst xmlns:p14="http://schemas.microsoft.com/office/powerpoint/2010/main">
-        <p14:section name="Opening" id="{7318b034-3fa5-a806-0141-77ecf3e64a25}">
+        <p14:section name="Opening" id="{11d4e842-745e-e500-845b-a48ca86b7d3e}">
           <p14:sldIdLst>
             <p14:sldId id="256"/>
             <p14:sldId id="257"/>
           </p14:sldIdLst>
         </p14:section>
-        <p14:section name="Thesis" id="{b5d2f243-4500-fa1d-3e61-2602f958097c}">
+        <p14:section name="Thesis" id="{05a4ff1e-2146-5bcc-9dd4-f31d254c607f}">
           <p14:sldIdLst>
             <p14:sldId id="258"/>
             <p14:sldId id="259"/>
           </p14:sldIdLst>
         </p14:section>
-        <p14:section name="Logic" id="{0301d9bd-3605-f3a1-4073-806f28ea7672}">
+        <p14:section name="Logic" id="{cef85d4a-c3ad-9aa9-0bfd-c5a3bc649439}">
           <p14:sldIdLst>
             <p14:sldId id="260"/>
             <p14:sldId id="261"/>
           </p14:sldIdLst>
         </p14:section>
-        <p14:section name="Proposal" id="{a02a8c10-1db2-f372-a429-0a7869b32210}">
+        <p14:section name="Proposal" id="{d996ec17-79d2-f383-fd27-6f1b86c5a9e2}">
           <p14:sldIdLst>
             <p14:sldId id="262"/>
             <p14:sldId id="263"/>
           </p14:sldIdLst>
         </p14:section>
-        <p14:section name="Layers" id="{f7a2759b-813b-cef4-f321-b12e0608b2d5}">
+        <p14:section name="Layers" id="{71528176-db76-f33c-632b-649e14420a9e}">
           <p14:sldIdLst>
             <p14:sldId id="264"/>
             <p14:sldId id="265"/>
           </p14:sldIdLst>
         </p14:section>
-        <p14:section name="How it meets the model" id="{7996bb09-4cc5-77c0-4770-a95d31d53da6}">
+        <p14:section name="How it meets the model" id="{116146bb-586f-fdaf-b86a-c3bad15ae6ff}">
           <p14:sldIdLst>
             <p14:sldId id="266"/>
             <p14:sldId id="267"/>
           </p14:sldIdLst>
         </p14:section>
-        <p14:section name="Status" id="{ff697b67-bb1e-c805-0c89-f6b035aecbbd}">
+        <p14:section name="Status" id="{df84df19-6d8e-e5b3-ff91-d047dad1bce7}">
           <p14:sldIdLst>
             <p14:sldId id="268"/>
           </p14:sldIdLst>
         </p14:section>
-        <p14:section name="Challenges" id="{08beeb9e-0df2-688e-3fe5-6fcb8a0973f1}">
+        <p14:section name="Challenges" id="{c7474423-db89-6b24-e617-8ac7911501a1}">
           <p14:sldIdLst>
             <p14:sldId id="269"/>
             <p14:sldId id="270"/>
           </p14:sldIdLst>
         </p14:section>
-        <p14:section name="What I need" id="{8748a8d7-55a1-48c6-7636-e55ad829b297}">
+        <p14:section name="What I need" id="{9f3f5355-9cda-7e83-ff8b-b814c1ed3257}">
           <p14:sldIdLst>
             <p14:sldId id="271"/>
             <p14:sldId id="272"/>
           </p14:sldIdLst>
         </p14:section>
-        <p14:section name="Close" id="{dc7570d7-6082-ab39-4ada-f064f33fe552}">
+        <p14:section name="Close" id="{9b6f338e-c068-5d29-d245-2faf7af2e9bd}">
           <p14:sldIdLst>
             <p14:sldId id="273"/>
           </p14:sldIdLst>
@@ -938,7 +938,7 @@
           <a:p>
             <a:r>
               <a:rPr lang="en-US" dirty="0"/>
-              <a:t>Honest status. The counts are what pytest prints today: 200 and 20. The loop figure is hw/loop/results.md. The area is docs/04 section 11. The 66 attacks are the reference stack's sweep.</a:t>
+              <a:t>Honest status. The counts are what pytest prints today: 200 and 20. The loop figure is hw/loop/results.md. The area is docs/04 section 11. The 75 attacks and 12 baselines are the reference stack's sweep (results/report.md).</a:t>
             </a:r>
             <a:endParaRPr lang="en-US" dirty="0"/>
           </a:p>
@@ -8792,7 +8792,7 @@
                 <a:ea typeface="Georgia" pitchFamily="34" charset="-122"/>
                 <a:cs typeface="Georgia" pitchFamily="34" charset="-120"/>
               </a:rPr>
-              <a:t>66</a:t>
+              <a:t>75</a:t>
             </a:r>
             <a:endParaRPr lang="en-US" sz="4600" dirty="0"/>
           </a:p>
@@ -8833,7 +8833,7 @@
                 <a:ea typeface="Arial" pitchFamily="34" charset="-122"/>
                 <a:cs typeface="Arial" pitchFamily="34" charset="-120"/>
               </a:rPr>
-              <a:t>attacks blocked with the predicted reason code in the software reference stack, with all 10 legitimate baselines passing</a:t>
+              <a:t>attacks blocked with the predicted reason code in the software reference stack, with all 12 legitimate baselines passing (results/report.md)</a:t>
             </a:r>
             <a:endParaRPr lang="en-US" sz="1250" dirty="0"/>
           </a:p>
@@ -16615,7 +16615,7 @@
                 <a:ea typeface="Arial" pitchFamily="34" charset="-122"/>
                 <a:cs typeface="Arial" pitchFamily="34" charset="-120"/>
               </a:rPr>
-              <a:t>The same 66 attacks are the acceptance test for every phase, from the software reference to the FPGA. The catalogue is the constant; the artifact changes.</a:t>
+              <a:t>The same catalogue of attacks (75 today, with 12 legitimate baselines) is the acceptance test for every phase, from the software reference to the FPGA. The catalogue is the constant; the artifact changes.</a:t>
             </a:r>
             <a:endParaRPr lang="en-US" sz="1400" dirty="0"/>
           </a:p>

--- a/docs/brief/chip-that-says-no-brief.pptx
+++ b/docs/brief/chip-that-says-no-brief.pptx
@@ -140,19 +140,19 @@
   <p:extLst>
     <p:ext uri="{521415D9-36F7-43E2-AB2F-B90AF26B5E84}">
       <p14:sectionLst xmlns:p14="http://schemas.microsoft.com/office/powerpoint/2010/main">
-        <p14:section name="Opening" id="{9db8e790-2faf-6ddd-2d53-bf5d3e657944}">
+        <p14:section name="Opening" id="{15031ac8-2e23-b945-475d-56878a07d29d}">
           <p14:sldIdLst>
             <p14:sldId id="256"/>
             <p14:sldId id="257"/>
           </p14:sldIdLst>
         </p14:section>
-        <p14:section name="Thesis" id="{7040639b-f92d-9b9f-2eca-52d981f57795}">
+        <p14:section name="Thesis" id="{cb5c7cee-aace-9bd3-7104-8998e09c117b}">
           <p14:sldIdLst>
             <p14:sldId id="258"/>
             <p14:sldId id="259"/>
           </p14:sldIdLst>
         </p14:section>
-        <p14:section name="The ladder" id="{5d5d364f-5feb-30f3-5d0e-59d90fea6fa6}">
+        <p14:section name="The ladder" id="{b087c9a4-fbcd-a042-6145-d584a1e5f97c}">
           <p14:sldIdLst>
             <p14:sldId id="260"/>
             <p14:sldId id="261"/>
@@ -160,7 +160,7 @@
             <p14:sldId id="263"/>
           </p14:sldIdLst>
         </p14:section>
-        <p14:section name="No kill switch" id="{0d495820-498a-eab9-fe7d-749ff8aa434b}">
+        <p14:section name="No kill switch" id="{b1db4911-e3ed-ac3c-75d6-40e80d91a8e4}">
           <p14:sldIdLst>
             <p14:sldId id="264"/>
             <p14:sldId id="265"/>
@@ -169,27 +169,27 @@
             <p14:sldId id="268"/>
           </p14:sldIdLst>
         </p14:section>
-        <p14:section name="Logic" id="{9d9e7d25-0f95-78be-b959-02326b8e56a6}">
+        <p14:section name="Logic" id="{2ae28cba-928b-bafb-0a28-b85d058bd34d}">
           <p14:sldIdLst>
             <p14:sldId id="269"/>
             <p14:sldId id="270"/>
             <p14:sldId id="271"/>
           </p14:sldIdLst>
         </p14:section>
-        <p14:section name="Proposal" id="{36f33551-aa90-0ab5-54ef-69f654ea4bea}">
+        <p14:section name="Proposal" id="{599d0b6f-1adb-7cb2-9cfa-d9eb7c52e55b}">
           <p14:sldIdLst>
             <p14:sldId id="272"/>
             <p14:sldId id="273"/>
             <p14:sldId id="274"/>
           </p14:sldIdLst>
         </p14:section>
-        <p14:section name="Layers" id="{4d6f0d82-084d-4abe-9b41-7359112fd337}">
+        <p14:section name="Layers" id="{495f0ca7-b462-9620-d70f-361cd8ea2ef2}">
           <p14:sldIdLst>
             <p14:sldId id="275"/>
             <p14:sldId id="276"/>
           </p14:sldIdLst>
         </p14:section>
-        <p14:section name="One bad prompt" id="{5ceb85dd-163b-f80c-bff9-745d086a8cdb}">
+        <p14:section name="One bad prompt" id="{f352f641-40e8-0fd4-47c2-b6b567d4c532}">
           <p14:sldIdLst>
             <p14:sldId id="277"/>
             <p14:sldId id="278"/>
@@ -197,27 +197,27 @@
             <p14:sldId id="280"/>
           </p14:sldIdLst>
         </p14:section>
-        <p14:section name="Status" id="{bd70ba8f-9ae4-ee66-6b93-3a17ff147635}">
+        <p14:section name="Status" id="{6e96f1d8-f9a9-e81a-3c14-bdbf172ccee9}">
           <p14:sldIdLst>
             <p14:sldId id="281"/>
             <p14:sldId id="282"/>
             <p14:sldId id="283"/>
           </p14:sldIdLst>
         </p14:section>
-        <p14:section name="Challenges" id="{b76a4fd6-f77a-3f65-09d3-3c20eb7eedb7}">
+        <p14:section name="Challenges" id="{747a40f0-e1cb-e261-5f0c-9dc28a6e0a15}">
           <p14:sldIdLst>
             <p14:sldId id="284"/>
             <p14:sldId id="285"/>
             <p14:sldId id="286"/>
           </p14:sldIdLst>
         </p14:section>
-        <p14:section name="What I need" id="{8a529cfe-35f5-c35c-ae07-0716f20453a4}">
+        <p14:section name="What I need" id="{b539a038-f25d-152f-a6f3-913a29a3566d}">
           <p14:sldIdLst>
             <p14:sldId id="287"/>
             <p14:sldId id="288"/>
           </p14:sldIdLst>
         </p14:section>
-        <p14:section name="Close" id="{6d29ea4e-ff42-e7e8-38ba-b3d5d318d064}">
+        <p14:section name="Close" id="{bb415b6c-75c8-2e3f-0dc6-6e3f3771c1c4}">
           <p14:sldIdLst>
             <p14:sldId id="289"/>
           </p14:sldIdLst>
@@ -1133,7 +1133,7 @@
           <a:p>
             <a:r>
               <a:rPr lang="en-US" dirty="0"/>
-              <a:t>A brief for a short talk, redone after the first wave of experiments and the kill-switch work. Every topic has two slides: the plain one with a picture for the room, the technical one for the people who will want to argue. Say up front that nothing here is silicon yet: it is a design with machine-checked proofs, tests, hardware blocks and a circuit simulation behind it, and a public program trying to kill it before anyone cuts a mask.</a:t>
+              <a:t>A brief for a short talk, redone after two waves of experiments and the kill-switch work. Every topic has two slides: the plain one with a picture for the room, the technical one for the people who will want to argue. Say up front that nothing here is silicon yet: it is a design with machine-checked proofs, tests, hardware blocks and a circuit simulation behind it, and a public program trying to kill it before anyone cuts a mask.</a:t>
             </a:r>
             <a:endParaRPr lang="en-US" dirty="0"/>
           </a:p>
@@ -1749,7 +1749,7 @@
           <a:p>
             <a:r>
               <a:rPr lang="en-US" dirty="0"/>
-              <a:t>docs/19 section 2 and the two proof files. The point to make in the room: 200 tests had passed for a week and the prover found two holes the tests were never going to find, both of the kind the design is supposed to be immune to. And the honest limit: the proof is about the abstract machine. Wave 1's L4 replays the simulation's traces through that machine and found two steps the machine lacks, a boot step and tickets burned without executing; that is the theorem being widened, which is what L4 was for.</a:t>
+              <a:t>docs/19 section 2 and the two proof files. The point to make in the room: 200 tests had passed for a week and the prover found two holes the tests were never going to find, both of the kind the design is supposed to be immune to. And the honest limit: the proof is about the abstract machine. Wave 1's L4 replays the simulation's traces through a hand-copied re-encoding of that machine's guards (the gate's finding: the Z3 machine itself is not driven) and found two steps the machine lacks, a boot step and tickets burned without executing; that is the theorem being widened, which is what L4 was for.</a:t>
             </a:r>
             <a:endParaRPr lang="en-US" dirty="0"/>
           </a:p>
@@ -2717,7 +2717,7 @@
           <a:p>
             <a:r>
               <a:rPr lang="en-US" dirty="0"/>
-              <a:t>Honest status. The counts are what pytest prints today: 200, 20 and 56; make proof prints all three files holding. The loop figure is hw/loop/results.md. The area is docs/04 section 11. The 75 attacks, 12 baselines and 17 OASP entries are the reference stack's sweep (results/report.md). The zero is the one to say out loud: wave 1 built four experiments and the gate sent all four back with specific findings, which is the gate doing its job.</a:t>
+              <a:t>Honest status. The counts are what pytest prints today: 200, 20 and 56; make proof prints all three files holding. The loop figure is hw/loop/results.md. The area is docs/04 section 11. The 75 attacks, 12 baselines and 17 OASP entries are the reference stack's sweep (results/report.md). The zero is the one to say out loud: wave 1 built four experiments and every one came back with specific findings, three from the gate and YB-0052 from the safety repository's review, which is the gate doing its job; wave 2's five branches (PRs 18 to 22) wait for it.</a:t>
             </a:r>
             <a:endParaRPr lang="en-US" dirty="0"/>
           </a:p>
@@ -2805,7 +2805,7 @@
           <a:p>
             <a:r>
               <a:rPr lang="en-US" dirty="0"/>
-              <a:t>Every line is from the wave's report and the reviews in audit/wave-1, and Part 5 tells the same story in prose. Two findings matter beyond the experiments themselves: the simulation takes steps the theorem does not model, which is exactly what L4 was built to flush out; and two repositories that were supposed to agree on a wire format did not, which is now a failing test. The YB-0052 last finding, real hazard names in the overt rows, is the one I should never have needed a reviewer for.</a:t>
+              <a:t>Every line is from the wave's report and the reviews in audit/wave-1, and Part 5 tells the same story in prose. Two findings matter beyond the experiments themselves: the simulation takes steps the theorem does not model, which is exactly what L4 was built to flush out; and two repositories that were supposed to agree on a wire format did not, which is written down as a known gap with the checker pinning only what both sides agree on. The YB-0052 last finding, real hazard names in the overt rows, is the one I should never have needed a reviewer for.</a:t>
             </a:r>
             <a:endParaRPr lang="en-US" dirty="0"/>
           </a:p>
@@ -4545,7 +4545,7 @@
                 <a:ea typeface="Arial" pitchFamily="34" charset="-122"/>
                 <a:cs typeface="Arial" pitchFamily="34" charset="-120"/>
               </a:rPr>
-              <a:t>A multi-layer hardware approach to AI safety, after the first wave of experiments. There is no kill switch for AI, so the gate goes at the ends: the chip that runs the model and the device that does the deed. Each topic in two slides: the plain version with a picture, then the technical one.</a:t>
+              <a:t>A multi-layer hardware approach to AI safety, after two waves of experiments. There is no kill switch for AI, so the gate goes at the ends: the chip that runs the model and the device that does the deed. Each topic in two slides: the plain version with a picture, then the technical one.</a:t>
             </a:r>
             <a:endParaRPr lang="en-US" sz="1900" dirty="0"/>
           </a:p>
@@ -5675,7 +5675,7 @@
                 <a:ea typeface="Arial" pitchFamily="34" charset="-122"/>
                 <a:cs typeface="Arial" pitchFamily="34" charset="-120"/>
               </a:rPr>
-              <a:t>Without local loops, a network cut costs k nodes per machine and takes bystanders with it</a:t>
+              <a:t>Without local loops, a network cut costs at least k nodes per copy-device pair, several per machine, and takes bystanders with it</a:t>
             </a:r>
             <a:endParaRPr lang="en-US" sz="1150" dirty="0"/>
           </a:p>
@@ -10122,7 +10122,7 @@
                 <a:ea typeface="Arial" pitchFamily="34" charset="-122"/>
                 <a:cs typeface="Arial" pitchFamily="34" charset="-120"/>
               </a:rPr>
-              <a:t>P3 no replay: executed means spent, and spent is refused</a:t>
+              <a:t>P3 no replay: anything executed has its ticket marked spent</a:t>
             </a:r>
             <a:endParaRPr lang="en-US" sz="1050" dirty="0"/>
           </a:p>
@@ -10143,7 +10143,7 @@
                 <a:ea typeface="Arial" pitchFamily="34" charset="-122"/>
                 <a:cs typeface="Arial" pitchFamily="34" charset="-120"/>
               </a:rPr>
-              <a:t>P4 only the current edition is honoured</a:t>
+              <a:t>P4 a ticket's edition is never newer than the current one (the comparator admits only the current edition by construction)</a:t>
             </a:r>
             <a:endParaRPr lang="en-US" sz="1050" dirty="0"/>
           </a:p>
@@ -10780,7 +10780,7 @@
               <a:buNone/>
             </a:pPr>
             <a:r>
-              <a:rPr lang="en-US" sz="2600" b="1" dirty="0">
+              <a:rPr lang="en-US" sz="3200" b="1" dirty="0">
                 <a:solidFill>
                   <a:schemeClr val="tx1"/>
                 </a:solidFill>
@@ -10788,9 +10788,9 @@
                 <a:ea typeface="Georgia" pitchFamily="34" charset="-122"/>
                 <a:cs typeface="Georgia" pitchFamily="34" charset="-120"/>
               </a:rPr>
-              <a:t>The proposal: a referee chip beside every GPU</a:t>
-            </a:r>
-            <a:endParaRPr lang="en-US" sz="2600" dirty="0"/>
+              <a:t>The proposal: a referee beside every GPU</a:t>
+            </a:r>
+            <a:endParaRPr lang="en-US" sz="3200" dirty="0"/>
           </a:p>
         </p:txBody>
       </p:sp>
@@ -12259,7 +12259,7 @@
                 <a:ea typeface="Arial" pitchFamily="34" charset="-122"/>
                 <a:cs typeface="Arial" pitchFamily="34" charset="-120"/>
               </a:rPr>
-              <a:t>Per slot through the HGX connector: SMBus (SMBPBI), power brake, PERST#, PWR_EN, present and fault. HGX reset is grouped today (three PERST inputs for eight GPUs)</a:t>
+              <a:t>Per slot on the module: SMBus (SMBPBI), power brake, PERST#, PWR_EN, present and fault, where the baseboard exposes them. On HGX today reset is grouped (three PERST inputs for eight GPUs) and per-slot power and brake are undocumented</a:t>
             </a:r>
             <a:endParaRPr lang="en-US" sz="1100" dirty="0"/>
           </a:p>
@@ -12280,7 +12280,7 @@
                 <a:ea typeface="Arial" pitchFamily="34" charset="-122"/>
                 <a:cs typeface="Arial" pitchFamily="34" charset="-120"/>
               </a:rPr>
-              <a:t>NVSwitch port disable out of band through NSM; DPU steering tables through DOCA on the management port</a:t>
+              <a:t>NVSwitch port disable out of band through NSM (from the next reset today; apply-now is firmware ask 1); DPU steering tables through DOCA on the management port</a:t>
             </a:r>
             <a:endParaRPr lang="en-US" sz="1100" dirty="0"/>
           </a:p>
@@ -12414,7 +12414,7 @@
                 <a:ea typeface="Arial" pitchFamily="34" charset="-122"/>
                 <a:cs typeface="Arial" pitchFamily="34" charset="-120"/>
               </a:rPr>
-              <a:t>An OpenTitan-class root of trust: fuses, DICE key chain, OTBN for P-384 signatures (1,697,985 cycles, 17 ms at 100 MHz, so one signature per 50 ms batch), AES-256-CTR with HMAC-SHA-256 for storage</a:t>
+              <a:t>An OpenTitan-class root of trust: fuses, DICE key chain, OTBN for P-384 signatures (1,697,985 cycles, 17 ms at 100 MHz, 34 ms at the prototype's 50 MHz, so one signature per 50 ms batch), AES-256-CTR with HMAC-SHA-256 for storage</a:t>
             </a:r>
             <a:endParaRPr lang="en-US" sz="1100" dirty="0"/>
           </a:p>
@@ -12435,7 +12435,7 @@
                 <a:ea typeface="Arial" pitchFamily="34" charset="-122"/>
                 <a:cs typeface="Arial" pitchFamily="34" charset="-120"/>
               </a:rPr>
-              <a:t>A mailbox of 21 signed commands, checked in order: sequence number, rules edition, signature; the first failure is reported</a:t>
+              <a:t>A mailbox of 21 commands; the ones that change anything are signed and checked in order: sequence number, rules edition, signature; the first failure is reported</a:t>
             </a:r>
             <a:endParaRPr lang="en-US" sz="1100" dirty="0"/>
           </a:p>
@@ -12640,7 +12640,7 @@
         <p:spPr>
           <a:xfrm>
             <a:off x="548640" y="4590288"/>
-            <a:ext cx="11094415" cy="511387"/>
+            <a:ext cx="11094415" cy="493437"/>
           </a:xfrm>
           <a:prstGeom prst="rect">
             <a:avLst/>
@@ -12665,7 +12665,7 @@
         <p:spPr>
           <a:xfrm>
             <a:off x="630936" y="4672584"/>
-            <a:ext cx="1115568" cy="346795"/>
+            <a:ext cx="1115568" cy="328845"/>
           </a:xfrm>
           <a:prstGeom prst="rect">
             <a:avLst/>
@@ -12706,7 +12706,7 @@
         <p:spPr>
           <a:xfrm>
             <a:off x="1911096" y="4672584"/>
-            <a:ext cx="5687568" cy="346795"/>
+            <a:ext cx="5687568" cy="328845"/>
           </a:xfrm>
           <a:prstGeom prst="rect">
             <a:avLst/>
@@ -12747,7 +12747,7 @@
         <p:spPr>
           <a:xfrm>
             <a:off x="7763256" y="4672584"/>
-            <a:ext cx="3797503" cy="346795"/>
+            <a:ext cx="3797503" cy="328845"/>
           </a:xfrm>
           <a:prstGeom prst="rect">
             <a:avLst/>
@@ -12787,8 +12787,8 @@
         </p:nvSpPr>
         <p:spPr>
           <a:xfrm>
-            <a:off x="548640" y="5101675"/>
-            <a:ext cx="11094415" cy="457539"/>
+            <a:off x="548640" y="5083725"/>
+            <a:ext cx="11094415" cy="493437"/>
           </a:xfrm>
           <a:prstGeom prst="rect">
             <a:avLst/>
@@ -12812,8 +12812,8 @@
         </p:nvSpPr>
         <p:spPr>
           <a:xfrm>
-            <a:off x="630936" y="5183971"/>
-            <a:ext cx="1115568" cy="292947"/>
+            <a:off x="630936" y="5166021"/>
+            <a:ext cx="1115568" cy="328845"/>
           </a:xfrm>
           <a:prstGeom prst="rect">
             <a:avLst/>
@@ -12853,8 +12853,8 @@
         </p:nvSpPr>
         <p:spPr>
           <a:xfrm>
-            <a:off x="1911096" y="5183971"/>
-            <a:ext cx="5687568" cy="292947"/>
+            <a:off x="1911096" y="5166021"/>
+            <a:ext cx="5687568" cy="328845"/>
           </a:xfrm>
           <a:prstGeom prst="rect">
             <a:avLst/>
@@ -12880,7 +12880,7 @@
                 <a:ea typeface="Arial" pitchFamily="34" charset="-122"/>
                 <a:cs typeface="Arial" pitchFamily="34" charset="-120"/>
               </a:rPr>
-              <a:t>Same firmware, policy format and fabric on a board without a baseboard connector of its own</a:t>
+              <a:t>Same firmware, policy format and fabric where the switches' management is not reachable, or on a baseboard with direct NVLink and no NVSwitch</a:t>
             </a:r>
             <a:endParaRPr lang="en-US" sz="1000" dirty="0"/>
           </a:p>
@@ -12894,8 +12894,8 @@
         </p:nvSpPr>
         <p:spPr>
           <a:xfrm>
-            <a:off x="7763256" y="5183971"/>
-            <a:ext cx="3797503" cy="292947"/>
+            <a:off x="7763256" y="5166021"/>
+            <a:ext cx="3797503" cy="328845"/>
           </a:xfrm>
           <a:prstGeom prst="rect">
             <a:avLst/>
@@ -12935,8 +12935,8 @@
         </p:nvSpPr>
         <p:spPr>
           <a:xfrm>
-            <a:off x="548640" y="5559213"/>
-            <a:ext cx="11094415" cy="457539"/>
+            <a:off x="548640" y="5577163"/>
+            <a:ext cx="11094415" cy="439589"/>
           </a:xfrm>
           <a:prstGeom prst="rect">
             <a:avLst/>
@@ -12960,8 +12960,8 @@
         </p:nvSpPr>
         <p:spPr>
           <a:xfrm>
-            <a:off x="630936" y="5641509"/>
-            <a:ext cx="1115568" cy="292947"/>
+            <a:off x="630936" y="5659459"/>
+            <a:ext cx="1115568" cy="274997"/>
           </a:xfrm>
           <a:prstGeom prst="rect">
             <a:avLst/>
@@ -13001,8 +13001,8 @@
         </p:nvSpPr>
         <p:spPr>
           <a:xfrm>
-            <a:off x="1911096" y="5641509"/>
-            <a:ext cx="5687568" cy="292947"/>
+            <a:off x="1911096" y="5659459"/>
+            <a:ext cx="5687568" cy="274997"/>
           </a:xfrm>
           <a:prstGeom prst="rect">
             <a:avLst/>
@@ -13042,8 +13042,8 @@
         </p:nvSpPr>
         <p:spPr>
           <a:xfrm>
-            <a:off x="7763256" y="5641509"/>
-            <a:ext cx="3797503" cy="292947"/>
+            <a:off x="7763256" y="5659459"/>
+            <a:ext cx="3797503" cy="274997"/>
           </a:xfrm>
           <a:prstGeom prst="rect">
             <a:avLst/>
@@ -13782,7 +13782,7 @@
                 <a:ea typeface="Arial" pitchFamily="34" charset="-122"/>
                 <a:cs typeface="Arial" pitchFamily="34" charset="-120"/>
               </a:rPr>
-              <a:t>The answer must land inside the timeout, so a hold cannot wait inside the call. The gate answers in well under a millisecond, thousands of times under the default</a:t>
+              <a:t>The answer must land inside the timeout, so a hold cannot wait inside the call. The gate answers in well under a millisecond in the model (unmeasured in a test), hundreds of times under the default</a:t>
             </a:r>
             <a:endParaRPr lang="en-US" sz="1000" dirty="0"/>
           </a:p>
@@ -15048,7 +15048,7 @@
                 <a:ea typeface="Arial" pitchFamily="34" charset="-122"/>
                 <a:cs typeface="Arial" pitchFamily="34" charset="-120"/>
               </a:rPr>
-              <a:t>now: proofs hold, wave 1 ran, nothing merged yet</a:t>
+              <a:t>now: proofs hold, waves 1 and 2 ran, nothing merged yet</a:t>
             </a:r>
             <a:endParaRPr lang="en-US" sz="850" dirty="0"/>
           </a:p>
@@ -15181,7 +15181,7 @@
                 <a:ea typeface="Arial" pitchFamily="34" charset="-122"/>
                 <a:cs typeface="Arial" pitchFamily="34" charset="-120"/>
               </a:rPr>
-              <a:t>RTL blocks, pinout, rack reference exist; NDA rows marked</a:t>
+              <a:t>RTL blocks, pinout, rack reference exist; the P2 register on a wave-2 branch</a:t>
             </a:r>
             <a:endParaRPr lang="en-US" sz="850" dirty="0"/>
           </a:p>
@@ -23586,7 +23586,7 @@
                 <a:ea typeface="Arial" pitchFamily="34" charset="-122"/>
                 <a:cs typeface="Arial" pitchFamily="34" charset="-120"/>
               </a:rPr>
-              <a:t>1 is the form well formed?   2 is the asking GPU attested, token valid, edition current?   3 seen this request before? (replay store)   4 alarm raised, heartbeat dead, rulebook expired? then no   5 which rule? workload × action, exact before wildcard; typed limits; lists (a protected site is a no)   6 which lane? automatic, needs a witness, needs a human   7 witnesses present, signed, fresh, about this request?   8 inside the rate window?   9 budget: reserve the amount against the limit   10 human lane: park a hold. Otherwise mint the ticket</a:t>
+              <a:t>1 is the chip running, and is the letter in order? (a dead heartbeat or an expired rulebook already stopped it at the door)   2 is the asking GPU attested, token valid, edition current?   3 seen this request before? (replay store)   4 alarm raised? then no   5 which rule, and does the form fit it? workload × action, exact before wildcard; the fields present; typed limits; lists (a protected site is a no)   6 which lane? automatic, needs a witness, needs a human   7 a witness verdict: observer key, fresh, about this request?   8 inside the rate window?   9 budget: reserve the amount against the limit   10 human lane: park a hold. Otherwise mint the ticket</a:t>
             </a:r>
             <a:endParaRPr lang="en-US" sz="850" dirty="0"/>
           </a:p>
@@ -26100,7 +26100,7 @@
                 <a:ea typeface="Arial" pitchFamily="34" charset="-122"/>
                 <a:cs typeface="Arial" pitchFamily="34" charset="-120"/>
               </a:rPr>
-              <a:t>model.not_evaluated</a:t>
+              <a:t>gate.not_attested; model.not_evaluated</a:t>
             </a:r>
             <a:endParaRPr lang="en-US" sz="1000" dirty="0"/>
           </a:p>
@@ -26865,7 +26865,7 @@
                 <a:ea typeface="Arial" pitchFamily="34" charset="-122"/>
                 <a:cs typeface="Arial" pitchFamily="34" charset="-120"/>
               </a:rPr>
-              <a:t>release.session_hazard_budget_exceeded, compute.budget_exceeded</a:t>
+              <a:t>gate.budget_exceeded, release.session_hazard_budget_exceeded, compute.budget_exceeded</a:t>
             </a:r>
             <a:endParaRPr lang="en-US" sz="1000" dirty="0"/>
           </a:p>
@@ -26906,7 +26906,7 @@
                 <a:ea typeface="Arial" pitchFamily="34" charset="-122"/>
                 <a:cs typeface="Arial" pitchFamily="34" charset="-120"/>
               </a:rPr>
-              <a:t>H13 shared budget; H18</a:t>
+              <a:t>H13 shared budget; H17; H18</a:t>
             </a:r>
             <a:endParaRPr lang="en-US" sz="1000" dirty="0"/>
           </a:p>
@@ -27416,7 +27416,7 @@
                 <a:ea typeface="Arial" pitchFamily="34" charset="-122"/>
                 <a:cs typeface="Arial" pitchFamily="34" charset="-120"/>
               </a:rPr>
-              <a:t>H2 enforcement points; the plot narration</a:t>
+              <a:t>H2 enforcement points; H10 leakage; the plot narration</a:t>
             </a:r>
             <a:endParaRPr lang="en-US" sz="1000" dirty="0"/>
           </a:p>
@@ -27928,7 +27928,7 @@
                 <a:ea typeface="Arial" pitchFamily="34" charset="-122"/>
                 <a:cs typeface="Arial" pitchFamily="34" charset="-120"/>
               </a:rPr>
-              <a:t>hypothesis tests pass in the functional model of the governor and a simulated 72-GPU rack (H0 to H18)</a:t>
+              <a:t>hypothesis tests pass in the functional model of the governor and simulated racks of up to five GPUs (H0 to H18)</a:t>
             </a:r>
             <a:endParaRPr lang="en-US" sz="1050" dirty="0"/>
           </a:p>
@@ -28582,7 +28582,7 @@
                 <a:ea typeface="Arial" pitchFamily="34" charset="-122"/>
                 <a:cs typeface="Arial" pitchFamily="34" charset="-120"/>
               </a:rPr>
-              <a:t>of core logic for the governor as configured, 1.4 by 1.4 mm, inside a 10 mm² shuttle harness</a:t>
+              <a:t>die outline configured for the control core, 1.4 by 1.4 mm, inside a 10 mm² shuttle harness; not yet placed and routed</a:t>
             </a:r>
             <a:endParaRPr lang="en-US" sz="1050" dirty="0"/>
           </a:p>
@@ -28691,7 +28691,7 @@
                 <a:ea typeface="Arial" pitchFamily="34" charset="-122"/>
                 <a:cs typeface="Arial" pitchFamily="34" charset="-120"/>
               </a:rPr>
-              <a:t>merged from the first wave: four experiments built, all four sent back by the gate with findings; every review public in audit/wave-1</a:t>
+              <a:t>merged from two waves: wave 1 built four, three sent back by the gate and one by the safety repository's review; wave 2 built five more, four passing acceptance, the gate still to run</a:t>
             </a:r>
             <a:endParaRPr lang="en-US" sz="1050" dirty="0"/>
           </a:p>
@@ -28817,7 +28817,7 @@
                 <a:ea typeface="Arial" pitchFamily="34" charset="-122"/>
                 <a:cs typeface="Arial" pitchFamily="34" charset="-120"/>
               </a:rPr>
-              <a:t>Everything here is model, proof, RTL simulation and circuit simulation. The two numbers that decide adoption, the real overhead and the false-halt rate, are not measured on hardware yet. Nothing has merged from the first wave; every result sits on a branch with its review attached.</a:t>
+              <a:t>Everything here is model, proof, RTL simulation and circuit simulation. The two numbers that decide adoption, the real overhead and the false-halt rate, are not measured on hardware yet. Nothing has merged from two waves; every result sits on a branch, with its review attached for wave 1.</a:t>
             </a:r>
             <a:endParaRPr lang="en-US" sz="1400" dirty="0"/>
           </a:p>
@@ -29113,7 +29113,7 @@
                 <a:ea typeface="Arial" pitchFamily="34" charset="-122"/>
                 <a:cs typeface="Arial" pitchFamily="34" charset="-120"/>
               </a:rPr>
-              <a:t>What the gate found</a:t>
+              <a:t>What was found</a:t>
             </a:r>
             <a:endParaRPr lang="en-US" sz="1000" dirty="0"/>
           </a:p>
@@ -29169,7 +29169,7 @@
         <p:spPr>
           <a:xfrm>
             <a:off x="548640" y="1801368"/>
-            <a:ext cx="11094415" cy="820928"/>
+            <a:ext cx="11094415" cy="939292"/>
           </a:xfrm>
           <a:prstGeom prst="rect">
             <a:avLst/>
@@ -29243,7 +29243,7 @@
         <p:spPr>
           <a:xfrm>
             <a:off x="1133856" y="1883664"/>
-            <a:ext cx="1161288" cy="656336"/>
+            <a:ext cx="1161288" cy="774700"/>
           </a:xfrm>
           <a:prstGeom prst="rect">
             <a:avLst/>
@@ -29284,7 +29284,7 @@
         <p:spPr>
           <a:xfrm>
             <a:off x="2459736" y="1883664"/>
-            <a:ext cx="3127248" cy="656336"/>
+            <a:ext cx="3127248" cy="774700"/>
           </a:xfrm>
           <a:prstGeom prst="rect">
             <a:avLst/>
@@ -29310,7 +29310,7 @@
                 <a:ea typeface="Arial" pitchFamily="34" charset="-122"/>
                 <a:cs typeface="Arial" pitchFamily="34" charset="-120"/>
               </a:rPr>
-              <a:t>A trace recorder for the governor model and a replayer that drives the proven machine with the recorded events; all 200 tests' traces replay; two broken governors fail with the event named</a:t>
+              <a:t>A trace recorder for the governor model and a replayer that runs a re-encoding of the proven machine's guards over the recorded events; 199 of 200 traces replay (one an expected refusal); two broken governors fail with the event named</a:t>
             </a:r>
             <a:endParaRPr lang="en-US" sz="1000" dirty="0"/>
           </a:p>
@@ -29325,7 +29325,7 @@
         <p:spPr>
           <a:xfrm>
             <a:off x="5751576" y="1883664"/>
-            <a:ext cx="3767328" cy="656336"/>
+            <a:ext cx="3767328" cy="774700"/>
           </a:xfrm>
           <a:prstGeom prst="rect">
             <a:avLst/>
@@ -29351,7 +29351,7 @@
                 <a:ea typeface="Arial" pitchFamily="34" charset="-122"/>
                 <a:cs typeface="Arial" pitchFamily="34" charset="-120"/>
               </a:rPr>
-              <a:t>The replayer passed only after it was widened to accept two steps the theorem's machine lacks, a boot step and tickets burned without executing: a gap in the theorem or a liberty in the simulation. Heartbeat events were never recorded</a:t>
+              <a:t>Passed only after it was widened to accept two steps the theorem's machine lacks (a boot step, tickets burned without executing): a gap in the theorem or a liberty in the simulation. The Z3 machine itself is not driven; the heartbeat check cannot fail (the sink emits heartbeat_lost just before it)</a:t>
             </a:r>
             <a:endParaRPr lang="en-US" sz="1000" dirty="0"/>
           </a:p>
@@ -29366,7 +29366,7 @@
         <p:spPr>
           <a:xfrm>
             <a:off x="9683496" y="1883664"/>
-            <a:ext cx="1877263" cy="656336"/>
+            <a:ext cx="1877263" cy="774700"/>
           </a:xfrm>
           <a:prstGeom prst="rect">
             <a:avLst/>
@@ -29406,8 +29406,8 @@
         </p:nvSpPr>
         <p:spPr>
           <a:xfrm>
-            <a:off x="548640" y="2622296"/>
-            <a:ext cx="11094415" cy="820928"/>
+            <a:off x="548640" y="2740660"/>
+            <a:ext cx="11094415" cy="939292"/>
           </a:xfrm>
           <a:prstGeom prst="rect">
             <a:avLst/>
@@ -29431,7 +29431,7 @@
         </p:nvSpPr>
         <p:spPr>
           <a:xfrm>
-            <a:off x="630936" y="2704592"/>
+            <a:off x="630936" y="2822956"/>
             <a:ext cx="384048" cy="384048"/>
           </a:xfrm>
           <a:prstGeom prst="ellipse">
@@ -29464,7 +29464,7 @@
         </p:blipFill>
         <p:spPr>
           <a:xfrm>
-            <a:off x="726948" y="2800604"/>
+            <a:off x="726948" y="2918968"/>
             <a:ext cx="192024" cy="192024"/>
           </a:xfrm>
           <a:prstGeom prst="rect">
@@ -29480,8 +29480,8 @@
         </p:nvSpPr>
         <p:spPr>
           <a:xfrm>
-            <a:off x="1133856" y="2704592"/>
-            <a:ext cx="1161288" cy="656336"/>
+            <a:off x="1133856" y="2822956"/>
+            <a:ext cx="1161288" cy="774700"/>
           </a:xfrm>
           <a:prstGeom prst="rect">
             <a:avLst/>
@@ -29521,8 +29521,8 @@
         </p:nvSpPr>
         <p:spPr>
           <a:xfrm>
-            <a:off x="2459736" y="2704592"/>
-            <a:ext cx="3127248" cy="656336"/>
+            <a:off x="2459736" y="2822956"/>
+            <a:ext cx="3127248" cy="774700"/>
           </a:xfrm>
           <a:prstGeom prst="rect">
             <a:avLst/>
@@ -29548,7 +29548,7 @@
                 <a:ea typeface="Arial" pitchFamily="34" charset="-122"/>
                 <a:cs typeface="Arial" pitchFamily="34" charset="-120"/>
               </a:rPr>
-              <a:t>The reference stack's gate and the governor's fed the same requests; 21 catalogue entries compared, 18 agree, five disagreements pinned as G1 to G5 with their inputs</a:t>
+              <a:t>The reference stack's gate and the governor's fed the same requests; 20 catalogue entries compared, 17 agree, five disagreements pinned as G1 to G5 with their inputs (three from the catalogue, two from the random sweep)</a:t>
             </a:r>
             <a:endParaRPr lang="en-US" sz="1000" dirty="0"/>
           </a:p>
@@ -29562,8 +29562,8 @@
         </p:nvSpPr>
         <p:spPr>
           <a:xfrm>
-            <a:off x="5751576" y="2704592"/>
-            <a:ext cx="3767328" cy="656336"/>
+            <a:off x="5751576" y="2822956"/>
+            <a:ext cx="3767328" cy="774700"/>
           </a:xfrm>
           <a:prstGeom prst="rect">
             <a:avLst/>
@@ -29589,7 +29589,7 @@
                 <a:ea typeface="Arial" pitchFamily="34" charset="-122"/>
                 <a:cs typeface="Arial" pitchFamily="34" charset="-120"/>
               </a:rPr>
-              <a:t>"Ambiguity in the policy" was claimed without reading the policy document; one of the five points at a bug in the governor model; 21 of 87 is not the whole catalogue</a:t>
+              <a:t>"Ambiguity in the policy" was claimed without reading the policy document; one of the five points at a bug in the governor model; 20 of 87 is not the whole catalogue</a:t>
             </a:r>
             <a:endParaRPr lang="en-US" sz="1000" dirty="0"/>
           </a:p>
@@ -29603,8 +29603,8 @@
         </p:nvSpPr>
         <p:spPr>
           <a:xfrm>
-            <a:off x="9683496" y="2704592"/>
-            <a:ext cx="1877263" cy="656336"/>
+            <a:off x="9683496" y="2822956"/>
+            <a:ext cx="1877263" cy="774700"/>
           </a:xfrm>
           <a:prstGeom prst="rect">
             <a:avLst/>
@@ -29644,8 +29644,8 @@
         </p:nvSpPr>
         <p:spPr>
           <a:xfrm>
-            <a:off x="548640" y="3443224"/>
-            <a:ext cx="11094415" cy="975868"/>
+            <a:off x="548640" y="3679952"/>
+            <a:ext cx="11094415" cy="939292"/>
           </a:xfrm>
           <a:prstGeom prst="rect">
             <a:avLst/>
@@ -29669,7 +29669,7 @@
         </p:nvSpPr>
         <p:spPr>
           <a:xfrm>
-            <a:off x="630936" y="3525520"/>
+            <a:off x="630936" y="3762248"/>
             <a:ext cx="384048" cy="384048"/>
           </a:xfrm>
           <a:prstGeom prst="ellipse">
@@ -29702,7 +29702,7 @@
         </p:blipFill>
         <p:spPr>
           <a:xfrm>
-            <a:off x="726948" y="3621532"/>
+            <a:off x="726948" y="3858260"/>
             <a:ext cx="192024" cy="192024"/>
           </a:xfrm>
           <a:prstGeom prst="rect">
@@ -29718,8 +29718,8 @@
         </p:nvSpPr>
         <p:spPr>
           <a:xfrm>
-            <a:off x="1133856" y="3525520"/>
-            <a:ext cx="1161288" cy="811276"/>
+            <a:off x="1133856" y="3762248"/>
+            <a:ext cx="1161288" cy="774700"/>
           </a:xfrm>
           <a:prstGeom prst="rect">
             <a:avLst/>
@@ -29759,8 +29759,8 @@
         </p:nvSpPr>
         <p:spPr>
           <a:xfrm>
-            <a:off x="2459736" y="3525520"/>
-            <a:ext cx="3127248" cy="811276"/>
+            <a:off x="2459736" y="3762248"/>
+            <a:ext cx="3127248" cy="774700"/>
           </a:xfrm>
           <a:prstGeom prst="rect">
             <a:avLst/>
@@ -29800,8 +29800,8 @@
         </p:nvSpPr>
         <p:spPr>
           <a:xfrm>
-            <a:off x="5751576" y="3525520"/>
-            <a:ext cx="3767328" cy="811276"/>
+            <a:off x="5751576" y="3762248"/>
+            <a:ext cx="3767328" cy="774700"/>
           </a:xfrm>
           <a:prstGeom prst="rect">
             <a:avLst/>
@@ -29827,7 +29827,7 @@
                 <a:ea typeface="Arial" pitchFamily="34" charset="-122"/>
                 <a:cs typeface="Arial" pitchFamily="34" charset="-120"/>
               </a:rPr>
-              <a:t>The governor's envelope (16-character signer, hex signature, no public key) does not match the lanes contract (8, base64, embedded key): two repositories that were supposed to agree on the wire format did not. Now a failing test instead of a surprise</a:t>
+              <a:t>The governor's envelope (hex signature, no embedded key) does not match the lanes contract (base64, embedded key): two repositories meant to agree on the wire format did not; a known gap, the checker pins what both agree on. The gate: two corrupt patch hunks, cross-repository acceptance not met</a:t>
             </a:r>
             <a:endParaRPr lang="en-US" sz="1000" dirty="0"/>
           </a:p>
@@ -29841,8 +29841,8 @@
         </p:nvSpPr>
         <p:spPr>
           <a:xfrm>
-            <a:off x="9683496" y="3525520"/>
-            <a:ext cx="1877263" cy="811276"/>
+            <a:off x="9683496" y="3762248"/>
+            <a:ext cx="1877263" cy="774700"/>
           </a:xfrm>
           <a:prstGeom prst="rect">
             <a:avLst/>
@@ -29882,8 +29882,8 @@
         </p:nvSpPr>
         <p:spPr>
           <a:xfrm>
-            <a:off x="548640" y="4419092"/>
-            <a:ext cx="11094415" cy="975868"/>
+            <a:off x="548640" y="4619244"/>
+            <a:ext cx="11094415" cy="939292"/>
           </a:xfrm>
           <a:prstGeom prst="rect">
             <a:avLst/>
@@ -29907,7 +29907,7 @@
         </p:nvSpPr>
         <p:spPr>
           <a:xfrm>
-            <a:off x="630936" y="4501388"/>
+            <a:off x="630936" y="4701540"/>
             <a:ext cx="384048" cy="384048"/>
           </a:xfrm>
           <a:prstGeom prst="ellipse">
@@ -29940,7 +29940,7 @@
         </p:blipFill>
         <p:spPr>
           <a:xfrm>
-            <a:off x="726948" y="4597400"/>
+            <a:off x="726948" y="4797552"/>
             <a:ext cx="192024" cy="192024"/>
           </a:xfrm>
           <a:prstGeom prst="rect">
@@ -29956,8 +29956,8 @@
         </p:nvSpPr>
         <p:spPr>
           <a:xfrm>
-            <a:off x="1133856" y="4501388"/>
-            <a:ext cx="1161288" cy="811276"/>
+            <a:off x="1133856" y="4701540"/>
+            <a:ext cx="1161288" cy="774700"/>
           </a:xfrm>
           <a:prstGeom prst="rect">
             <a:avLst/>
@@ -29997,8 +29997,8 @@
         </p:nvSpPr>
         <p:spPr>
           <a:xfrm>
-            <a:off x="2459736" y="4501388"/>
-            <a:ext cx="3127248" cy="811276"/>
+            <a:off x="2459736" y="4701540"/>
+            <a:ext cx="3127248" cy="774700"/>
           </a:xfrm>
           <a:prstGeom prst="rect">
             <a:avLst/>
@@ -30038,8 +30038,8 @@
         </p:nvSpPr>
         <p:spPr>
           <a:xfrm>
-            <a:off x="5751576" y="4501388"/>
-            <a:ext cx="3767328" cy="811276"/>
+            <a:off x="5751576" y="4701540"/>
+            <a:ext cx="3767328" cy="774700"/>
           </a:xfrm>
           <a:prstGeom prst="rect">
             <a:avLst/>
@@ -30079,8 +30079,8 @@
         </p:nvSpPr>
         <p:spPr>
           <a:xfrm>
-            <a:off x="9683496" y="4501388"/>
-            <a:ext cx="1877263" cy="811276"/>
+            <a:off x="9683496" y="4701540"/>
+            <a:ext cx="1877263" cy="774700"/>
           </a:xfrm>
           <a:prstGeom prst="rect">
             <a:avLst/>
@@ -30678,7 +30678,7 @@
                 <a:ea typeface="Arial" pitchFamily="34" charset="-122"/>
                 <a:cs typeface="Arial" pitchFamily="34" charset="-120"/>
               </a:rPr>
-              <a:t>Now. Proofs hold; wave 1 ran; nothing merged yet</a:t>
+              <a:t>Now. Proofs hold; waves 1 and 2 ran; nothing merged yet</a:t>
             </a:r>
             <a:endParaRPr lang="en-US" sz="900" dirty="0"/>
           </a:p>
@@ -31996,7 +31996,7 @@
                 <a:ea typeface="Arial" pitchFamily="34" charset="-122"/>
                 <a:cs typeface="Arial" pitchFamily="34" charset="-120"/>
               </a:rPr>
-              <a:t>If an experiment kills the chip as designed, that is the result, and it is the reason to do this in software first. If the design survives all twenty, the next post is about an FPGA.</a:t>
+              <a:t>If an experiment kills the chip as designed, that is the result, and it is the reason to do this in software first. If the design survives all twenty-three, the next post is about an FPGA.</a:t>
             </a:r>
             <a:endParaRPr lang="en-US" sz="1400" dirty="0"/>
           </a:p>
@@ -33350,7 +33350,7 @@
                 <a:ea typeface="Arial" pitchFamily="34" charset="-122"/>
                 <a:cs typeface="Arial" pitchFamily="34" charset="-120"/>
               </a:rPr>
-              <a:t>One P-384 signature costs 17 ms on the OTBN engine. Batching keeps it under one percent in the model, not yet in silicon.</a:t>
+              <a:t>One P-384 signature costs 17 ms on the OTBN engine. The firmware share is under 0.1 percent of GPU time in the model; batching keeps one engine at 34 percent busy (272 unbatched). Not yet in silicon.</a:t>
             </a:r>
             <a:endParaRPr lang="en-US" sz="1050" dirty="0"/>
           </a:p>
@@ -35557,7 +35557,7 @@
                 <a:ea typeface="Arial" pitchFamily="34" charset="-122"/>
                 <a:cs typeface="Arial" pitchFamily="34" charset="-120"/>
               </a:rPr>
-              <a:t>L4 replays every test's trace through the proven machine; L5 compares the reference gate and the governor on the catalogue</a:t>
+              <a:t>L4 replays every test's trace through a re-encoding of the proven machine's guards; L5 compares the reference gate and the governor on the catalogue</a:t>
             </a:r>
             <a:endParaRPr lang="en-US" sz="1000" dirty="0"/>
           </a:p>
@@ -35598,7 +35598,7 @@
                 <a:ea typeface="Arial" pitchFamily="34" charset="-122"/>
                 <a:cs typeface="Arial" pitchFamily="34" charset="-120"/>
               </a:rPr>
-              <a:t>The replayer was widened to accept a boot step and burned tickets the theorem lacks; the theorem gains the steps or the simulation loses them. 18 of 21 compared entries agree; five pinned, not yet called bug or ambiguity</a:t>
+              <a:t>The replayer was widened to accept a boot step and burned tickets the theorem lacks; the theorem gains the steps or the simulation loses them. 17 of 20 compared entries agree; five pinned, not yet called bug or ambiguity</a:t>
             </a:r>
             <a:endParaRPr lang="en-US" sz="1000" dirty="0"/>
           </a:p>
@@ -35795,7 +35795,7 @@
                 <a:ea typeface="Arial" pitchFamily="34" charset="-122"/>
                 <a:cs typeface="Arial" pitchFamily="34" charset="-120"/>
               </a:rPr>
-              <a:t>Modelled (H11) and simulated (ngspice). Not measured on hardware (N2)</a:t>
+              <a:t>Modelled (H11) and simulated (ngspice). N2 models the false-halt rate; N3 measures it on hardware, still open</a:t>
             </a:r>
             <a:endParaRPr lang="en-US" sz="1000" dirty="0"/>
           </a:p>
@@ -36189,7 +36189,7 @@
                 <a:ea typeface="Arial" pitchFamily="34" charset="-122"/>
                 <a:cs typeface="Arial" pitchFamily="34" charset="-120"/>
               </a:rPr>
-              <a:t>Modelled (H9). Silicon or FPGA measurement: open (N1, N3)</a:t>
+              <a:t>Modelled (H9); N1 simulates the overhead at scale; silicon or FPGA measurement open (N3)</a:t>
             </a:r>
             <a:endParaRPr lang="en-US" sz="1000" dirty="0"/>
           </a:p>
@@ -37260,7 +37260,7 @@
                 <a:ea typeface="Arial" pitchFamily="34" charset="-122"/>
                 <a:cs typeface="Arial" pitchFamily="34" charset="-120"/>
               </a:rPr>
-              <a:t>A module on the board the server already has, through the connector it already uses; asks NVIDIA for firmware and software, not silicon; goes into installed racks</a:t>
+              <a:t>A module on the board the server already has, through the connector it already uses; asks NVIDIA for firmware and software for the rack tier, silicon only for the integrated tier; goes into installed racks</a:t>
             </a:r>
             <a:endParaRPr lang="en-US" sz="1000" dirty="0"/>
           </a:p>
@@ -39062,7 +39062,7 @@
         <p:spPr>
           <a:xfrm>
             <a:off x="548640" y="2430780"/>
-            <a:ext cx="7863840" cy="784352"/>
+            <a:ext cx="7863840" cy="939292"/>
           </a:xfrm>
           <a:prstGeom prst="rect">
             <a:avLst/>
@@ -39136,7 +39136,7 @@
         <p:spPr>
           <a:xfrm>
             <a:off x="1133856" y="2513076"/>
-            <a:ext cx="1344168" cy="619760"/>
+            <a:ext cx="1344168" cy="774700"/>
           </a:xfrm>
           <a:prstGeom prst="rect">
             <a:avLst/>
@@ -39177,7 +39177,7 @@
         <p:spPr>
           <a:xfrm>
             <a:off x="2642616" y="2513076"/>
-            <a:ext cx="2761488" cy="619760"/>
+            <a:ext cx="2761488" cy="774700"/>
           </a:xfrm>
           <a:prstGeom prst="rect">
             <a:avLst/>
@@ -39203,7 +39203,7 @@
                 <a:ea typeface="Arial" pitchFamily="34" charset="-122"/>
                 <a:cs typeface="Arial" pitchFamily="34" charset="-120"/>
               </a:rPr>
-              <a:t>Seven firmware asks: NSM port-disable semantics, per-GPU reset, buffer-class checkers in the copy engines and peer MMU; nothing from the silicon</a:t>
+              <a:t>Seven firmware asks on the switches (apply-now port disable, isolation mode, lockable flags, a policy hash, FM signatures); per-GPU reset and brake from the board; the integrated tier's copy-engine checkers are silicon</a:t>
             </a:r>
             <a:endParaRPr lang="en-US" sz="1000" dirty="0"/>
           </a:p>
@@ -39218,7 +39218,7 @@
         <p:spPr>
           <a:xfrm>
             <a:off x="5568696" y="2513076"/>
-            <a:ext cx="2761488" cy="619760"/>
+            <a:ext cx="2761488" cy="774700"/>
           </a:xfrm>
           <a:prstGeom prst="rect">
             <a:avLst/>
@@ -39258,7 +39258,7 @@
         </p:nvSpPr>
         <p:spPr>
           <a:xfrm>
-            <a:off x="548640" y="3215132"/>
+            <a:off x="548640" y="3370072"/>
             <a:ext cx="7863840" cy="629412"/>
           </a:xfrm>
           <a:prstGeom prst="rect">
@@ -39283,7 +39283,7 @@
         </p:nvSpPr>
         <p:spPr>
           <a:xfrm>
-            <a:off x="630936" y="3297428"/>
+            <a:off x="630936" y="3452368"/>
             <a:ext cx="384048" cy="384048"/>
           </a:xfrm>
           <a:prstGeom prst="ellipse">
@@ -39316,7 +39316,7 @@
         </p:blipFill>
         <p:spPr>
           <a:xfrm>
-            <a:off x="726948" y="3393440"/>
+            <a:off x="726948" y="3548380"/>
             <a:ext cx="192024" cy="192024"/>
           </a:xfrm>
           <a:prstGeom prst="rect">
@@ -39332,7 +39332,7 @@
         </p:nvSpPr>
         <p:spPr>
           <a:xfrm>
-            <a:off x="1133856" y="3297428"/>
+            <a:off x="1133856" y="3452368"/>
             <a:ext cx="1344168" cy="464820"/>
           </a:xfrm>
           <a:prstGeom prst="rect">
@@ -39373,7 +39373,7 @@
         </p:nvSpPr>
         <p:spPr>
           <a:xfrm>
-            <a:off x="2642616" y="3297428"/>
+            <a:off x="2642616" y="3452368"/>
             <a:ext cx="2761488" cy="464820"/>
           </a:xfrm>
           <a:prstGeom prst="rect">
@@ -39414,7 +39414,7 @@
         </p:nvSpPr>
         <p:spPr>
           <a:xfrm>
-            <a:off x="5568696" y="3297428"/>
+            <a:off x="5568696" y="3452368"/>
             <a:ext cx="2761488" cy="464820"/>
           </a:xfrm>
           <a:prstGeom prst="rect">
@@ -39455,7 +39455,7 @@
         </p:nvSpPr>
         <p:spPr>
           <a:xfrm>
-            <a:off x="548640" y="3844544"/>
+            <a:off x="548640" y="3999484"/>
             <a:ext cx="7863840" cy="629412"/>
           </a:xfrm>
           <a:prstGeom prst="rect">
@@ -39480,7 +39480,7 @@
         </p:nvSpPr>
         <p:spPr>
           <a:xfrm>
-            <a:off x="630936" y="3926840"/>
+            <a:off x="630936" y="4081780"/>
             <a:ext cx="384048" cy="384048"/>
           </a:xfrm>
           <a:prstGeom prst="ellipse">
@@ -39513,7 +39513,7 @@
         </p:blipFill>
         <p:spPr>
           <a:xfrm>
-            <a:off x="726948" y="4022852"/>
+            <a:off x="726948" y="4177792"/>
             <a:ext cx="192024" cy="192024"/>
           </a:xfrm>
           <a:prstGeom prst="rect">
@@ -39529,7 +39529,7 @@
         </p:nvSpPr>
         <p:spPr>
           <a:xfrm>
-            <a:off x="1133856" y="3926840"/>
+            <a:off x="1133856" y="4081780"/>
             <a:ext cx="1344168" cy="464820"/>
           </a:xfrm>
           <a:prstGeom prst="rect">
@@ -39570,7 +39570,7 @@
         </p:nvSpPr>
         <p:spPr>
           <a:xfrm>
-            <a:off x="2642616" y="3926840"/>
+            <a:off x="2642616" y="4081780"/>
             <a:ext cx="2761488" cy="464820"/>
           </a:xfrm>
           <a:prstGeom prst="rect">
@@ -39611,7 +39611,7 @@
         </p:nvSpPr>
         <p:spPr>
           <a:xfrm>
-            <a:off x="5568696" y="3926840"/>
+            <a:off x="5568696" y="4081780"/>
             <a:ext cx="2761488" cy="464820"/>
           </a:xfrm>
           <a:prstGeom prst="rect">
@@ -39652,7 +39652,7 @@
         </p:nvSpPr>
         <p:spPr>
           <a:xfrm>
-            <a:off x="548640" y="4473956"/>
+            <a:off x="548640" y="4628896"/>
             <a:ext cx="7863840" cy="474472"/>
           </a:xfrm>
           <a:prstGeom prst="rect">
@@ -39677,7 +39677,7 @@
         </p:nvSpPr>
         <p:spPr>
           <a:xfrm>
-            <a:off x="630936" y="4556252"/>
+            <a:off x="630936" y="4711192"/>
             <a:ext cx="384048" cy="384048"/>
           </a:xfrm>
           <a:prstGeom prst="ellipse">
@@ -39710,7 +39710,7 @@
         </p:blipFill>
         <p:spPr>
           <a:xfrm>
-            <a:off x="726948" y="4652264"/>
+            <a:off x="726948" y="4807204"/>
             <a:ext cx="192024" cy="192024"/>
           </a:xfrm>
           <a:prstGeom prst="rect">
@@ -39726,7 +39726,7 @@
         </p:nvSpPr>
         <p:spPr>
           <a:xfrm>
-            <a:off x="1133856" y="4556252"/>
+            <a:off x="1133856" y="4711192"/>
             <a:ext cx="1344168" cy="309880"/>
           </a:xfrm>
           <a:prstGeom prst="rect">
@@ -39767,7 +39767,7 @@
         </p:nvSpPr>
         <p:spPr>
           <a:xfrm>
-            <a:off x="2642616" y="4556252"/>
+            <a:off x="2642616" y="4711192"/>
             <a:ext cx="2761488" cy="309880"/>
           </a:xfrm>
           <a:prstGeom prst="rect">
@@ -39808,7 +39808,7 @@
         </p:nvSpPr>
         <p:spPr>
           <a:xfrm>
-            <a:off x="5568696" y="4556252"/>
+            <a:off x="5568696" y="4711192"/>
             <a:ext cx="2761488" cy="309880"/>
           </a:xfrm>
           <a:prstGeom prst="rect">
@@ -39849,7 +39849,7 @@
         </p:nvSpPr>
         <p:spPr>
           <a:xfrm>
-            <a:off x="548640" y="4948428"/>
+            <a:off x="548640" y="5103368"/>
             <a:ext cx="7863840" cy="629412"/>
           </a:xfrm>
           <a:prstGeom prst="rect">
@@ -39874,7 +39874,7 @@
         </p:nvSpPr>
         <p:spPr>
           <a:xfrm>
-            <a:off x="630936" y="5030724"/>
+            <a:off x="630936" y="5185664"/>
             <a:ext cx="384048" cy="384048"/>
           </a:xfrm>
           <a:prstGeom prst="ellipse">
@@ -39907,7 +39907,7 @@
         </p:blipFill>
         <p:spPr>
           <a:xfrm>
-            <a:off x="726948" y="5126736"/>
+            <a:off x="726948" y="5281676"/>
             <a:ext cx="192024" cy="192024"/>
           </a:xfrm>
           <a:prstGeom prst="rect">
@@ -39923,7 +39923,7 @@
         </p:nvSpPr>
         <p:spPr>
           <a:xfrm>
-            <a:off x="1133856" y="5030724"/>
+            <a:off x="1133856" y="5185664"/>
             <a:ext cx="1344168" cy="464820"/>
           </a:xfrm>
           <a:prstGeom prst="rect">
@@ -39964,7 +39964,7 @@
         </p:nvSpPr>
         <p:spPr>
           <a:xfrm>
-            <a:off x="2642616" y="5030724"/>
+            <a:off x="2642616" y="5185664"/>
             <a:ext cx="2761488" cy="464820"/>
           </a:xfrm>
           <a:prstGeom prst="rect">
@@ -40005,7 +40005,7 @@
         </p:nvSpPr>
         <p:spPr>
           <a:xfrm>
-            <a:off x="5568696" y="5030724"/>
+            <a:off x="5568696" y="5185664"/>
             <a:ext cx="2761488" cy="464820"/>
           </a:xfrm>
           <a:prstGeom prst="rect">
@@ -40046,7 +40046,7 @@
         </p:nvSpPr>
         <p:spPr>
           <a:xfrm>
-            <a:off x="548640" y="5577840"/>
+            <a:off x="548640" y="5732780"/>
             <a:ext cx="7863840" cy="784352"/>
           </a:xfrm>
           <a:prstGeom prst="rect">
@@ -40071,7 +40071,7 @@
         </p:nvSpPr>
         <p:spPr>
           <a:xfrm>
-            <a:off x="630936" y="5660136"/>
+            <a:off x="630936" y="5815076"/>
             <a:ext cx="384048" cy="384048"/>
           </a:xfrm>
           <a:prstGeom prst="ellipse">
@@ -40104,7 +40104,7 @@
         </p:blipFill>
         <p:spPr>
           <a:xfrm>
-            <a:off x="726948" y="5756148"/>
+            <a:off x="726948" y="5911088"/>
             <a:ext cx="192024" cy="192024"/>
           </a:xfrm>
           <a:prstGeom prst="rect">
@@ -40120,7 +40120,7 @@
         </p:nvSpPr>
         <p:spPr>
           <a:xfrm>
-            <a:off x="1133856" y="5660136"/>
+            <a:off x="1133856" y="5815076"/>
             <a:ext cx="1344168" cy="619760"/>
           </a:xfrm>
           <a:prstGeom prst="rect">
@@ -40161,7 +40161,7 @@
         </p:nvSpPr>
         <p:spPr>
           <a:xfrm>
-            <a:off x="2642616" y="5660136"/>
+            <a:off x="2642616" y="5815076"/>
             <a:ext cx="2761488" cy="619760"/>
           </a:xfrm>
           <a:prstGeom prst="rect">
@@ -40202,7 +40202,7 @@
         </p:nvSpPr>
         <p:spPr>
           <a:xfrm>
-            <a:off x="5568696" y="5660136"/>
+            <a:off x="5568696" y="5815076"/>
             <a:ext cx="2761488" cy="619760"/>
           </a:xfrm>
           <a:prstGeom prst="rect">
@@ -40738,7 +40738,7 @@
                 <a:ea typeface="Arial" pitchFamily="34" charset="-122"/>
                 <a:cs typeface="Arial" pitchFamily="34" charset="-120"/>
               </a:rPr>
-              <a:t>The Chip That Says No, parts 1 to 6; design documents 00 to 24; START-HERE.md is the route to check the work</a:t>
+              <a:t>The Chip That Says No, parts 1 to 7; design documents 00 to 25; START-HERE.md is the route to check the work</a:t>
             </a:r>
             <a:endParaRPr lang="en-US" sz="1100" dirty="0"/>
           </a:p>
@@ -41519,7 +41519,7 @@
                 <a:ea typeface="Arial" pitchFamily="34" charset="-122"/>
                 <a:cs typeface="Arial" pitchFamily="34" charset="-120"/>
               </a:rPr>
-              <a:t>About 2 mm² of core logic as configured (1.4 by 1.4 mm). Ten invariants of the gate (P0 to P9) and the commit-point protocol proven with Z3 in every reachable state; 200 model tests, 20 RTL tests, an independent audit.</a:t>
+              <a:t>A 1.4 by 1.4 mm die outline (about 2 mm²) configured for the control core, not yet placed and routed. Ten invariants of the gate (P0 to P9) and the commit-point protocol proven with Z3 in every reachable state; 200 model tests, 20 RTL tests, an independent audit.</a:t>
             </a:r>
             <a:endParaRPr lang="en-US" sz="1000" dirty="0"/>
           </a:p>
